--- a/week-08/presentations/ppts/day-03-capstone-architecture-ai-spec.pptx
+++ b/week-08/presentations/ppts/day-03-capstone-architecture-ai-spec.pptx
@@ -5212,7 +5212,7 @@
             </a:pPr>
             <a:r>
               <a:rPr/>
-              <a:t>🧿 The 5 Prompts</a:t>
+              <a:t>🤖 The 5 Prompts</a:t>
             </a:r>
           </a:p>
         </p:txBody>
@@ -5282,7 +5282,7 @@
             </a:pPr>
             <a:r>
               <a:rPr/>
-              <a:t>PRD-light §§1–5, TCD-light §1, TMD-light §3</a:t>
+              <a:t>PRD-light Sections 1–5, TCD-light Section 1, TMD-light Section 3</a:t>
             </a:r>
           </a:p>
           <a:p>
@@ -5309,7 +5309,7 @@
             </a:pPr>
             <a:r>
               <a:rPr/>
-              <a:t>TMD-light §1 + §3</a:t>
+              <a:t>TMD-light Section 1 + Section 3</a:t>
             </a:r>
           </a:p>
           <a:p>
@@ -5336,7 +5336,7 @@
             </a:pPr>
             <a:r>
               <a:rPr/>
-              <a:t>TMD-light §4</a:t>
+              <a:t>TMD-light Section 4</a:t>
             </a:r>
           </a:p>
           <a:p>
@@ -5363,7 +5363,7 @@
             </a:pPr>
             <a:r>
               <a:rPr/>
-              <a:t>TCD-light §3 + §4 + PRD-light §7</a:t>
+              <a:t>TCD-light Section 3 + Section 4 + PRD-light Section 7</a:t>
             </a:r>
           </a:p>
           <a:p>
@@ -5390,7 +5390,7 @@
             </a:pPr>
             <a:r>
               <a:rPr/>
-              <a:t>TCD-light §5 + §6</a:t>
+              <a:t>TCD-light Section 5 + Section 6</a:t>
             </a:r>
           </a:p>
           <a:p>

--- a/week-08/presentations/ppts/day-03-capstone-architecture-ai-spec.pptx
+++ b/week-08/presentations/ppts/day-03-capstone-architecture-ai-spec.pptx
@@ -5054,7 +5054,7 @@
             </a:pPr>
             <a:r>
               <a:rPr/>
-              <a:t>10 min: cloud topology + ROM cost</a:t>
+              <a:t>10 min: cloud topology + rough order of magnitude (ROM) cost</a:t>
             </a:r>
           </a:p>
           <a:p>
@@ -6305,25 +6305,25 @@
             </a:pPr>
             <a:r>
               <a:rPr/>
-              <a:t>Produce TCD-light in 40 minutes (Week-4 compressed)</a:t>
-            </a:r>
-          </a:p>
-          <a:p>
-            <a:pPr lvl="0" indent="0" marL="0">
-              <a:buNone/>
-            </a:pPr>
-            <a:r>
-              <a:rPr/>
-              <a:t>Produce TMD-light in 40 minutes (Week-5 compressed)</a:t>
-            </a:r>
-          </a:p>
-          <a:p>
-            <a:pPr lvl="0" indent="0" marL="0">
-              <a:buNone/>
-            </a:pPr>
-            <a:r>
-              <a:rPr/>
-              <a:t>Run the 5-prompt AI Spec sequence on the capstone</a:t>
+              <a:t>Produce Technical Concept Document (TCD-light) in 40 minutes (Week-4 compressed)</a:t>
+            </a:r>
+          </a:p>
+          <a:p>
+            <a:pPr lvl="0" indent="0" marL="0">
+              <a:buNone/>
+            </a:pPr>
+            <a:r>
+              <a:rPr/>
+              <a:t>Produce Technical Modeling Document (TMD-light) in 40 minutes (Week-5 compressed)</a:t>
+            </a:r>
+          </a:p>
+          <a:p>
+            <a:pPr lvl="0" indent="0" marL="0">
+              <a:buNone/>
+            </a:pPr>
+            <a:r>
+              <a:rPr/>
+              <a:t>Run the 5-prompt AI Spec sequence on the capstone, drawing on Day-2’s Product Requirements Document (PRD-light)</a:t>
             </a:r>
           </a:p>
           <a:p>
@@ -6790,16 +6790,16 @@
             </a:pPr>
             <a:r>
               <a:rPr/>
-              <a:t>10 min: STRIDE summary (3 threats)</a:t>
-            </a:r>
-          </a:p>
-          <a:p>
-            <a:pPr lvl="0" indent="0" marL="0">
-              <a:buNone/>
-            </a:pPr>
-            <a:r>
-              <a:rPr/>
-              <a:t>5 min: 3 SLOs</a:t>
+              <a:t>10 min: the STRIDE model (Spoofing, Tampering, Repudiation, Information disclosure, Denial of service, Elevation of privilege) summary (3 threats)</a:t>
+            </a:r>
+          </a:p>
+          <a:p>
+            <a:pPr lvl="0" indent="0" marL="0">
+              <a:buNone/>
+            </a:pPr>
+            <a:r>
+              <a:rPr/>
+              <a:t>5 min: 3 Service Level Objectives (SLOs)</a:t>
             </a:r>
           </a:p>
           <a:p>

--- a/week-08/presentations/ppts/day-03-capstone-architecture-ai-spec.pptx
+++ b/week-08/presentations/ppts/day-03-capstone-architecture-ai-spec.pptx
@@ -6693,6 +6693,41 @@
           </a:p>
         </p:txBody>
       </p:sp>
+      <p:sp>
+        <p:nvSpPr>
+          <p:cNvPr id="3" name="Content Placeholder 2"/>
+          <p:cNvSpPr>
+            <a:spLocks noGrp="1"/>
+          </p:cNvSpPr>
+          <p:nvPr>
+            <p:ph idx="1"/>
+          </p:nvPr>
+        </p:nvSpPr>
+        <p:spPr/>
+        <p:txBody>
+          <a:bodyPr/>
+          <a:lstStyle/>
+          <a:p>
+            <a:pPr lvl="0" indent="0">
+              <a:buNone/>
+            </a:pPr>
+            <a:r>
+              <a:rPr>
+                <a:latin typeface="Courier"/>
+              </a:rPr>
+              <a:t>## 1. Architecture stance — 1 paragraph
+(deploy / failure / scale)
+## 2. Integration map — table (system / owner / sync-async /
+R-W / failure handling)
+## 3. Threat-model summary — 3 STRIDE threats + mitigations
+## 4. SLOs — 1 latency / 1 availability / 1 rate-limit
+(target + defense + verification)
+## 5. Top 3 trade-offs — Option A/B/Choice/Cost/Revisit
+## 6. Stakeholder sign-off — 3–5 stakeholders + status</a:t>
+            </a:r>
+          </a:p>
+        </p:txBody>
+      </p:sp>
     </p:spTree>
   </p:cSld>
 </p:sld>
@@ -6940,6 +6975,41 @@
             <a:r>
               <a:rPr/>
               <a:t>📝 TMD-Light (1.5 pages)</a:t>
+            </a:r>
+          </a:p>
+        </p:txBody>
+      </p:sp>
+      <p:sp>
+        <p:nvSpPr>
+          <p:cNvPr id="3" name="Content Placeholder 2"/>
+          <p:cNvSpPr>
+            <a:spLocks noGrp="1"/>
+          </p:cNvSpPr>
+          <p:nvPr>
+            <p:ph idx="1"/>
+          </p:nvPr>
+        </p:nvSpPr>
+        <p:spPr/>
+        <p:txBody>
+          <a:bodyPr/>
+          <a:lstStyle/>
+          <a:p>
+            <a:pPr lvl="0" indent="0">
+              <a:buNone/>
+            </a:pPr>
+            <a:r>
+              <a:rPr>
+                <a:latin typeface="Courier"/>
+              </a:rPr>
+              <a:t>## 1. Data model — 3–5 entities (PK + indexes + relationships)
++ 1 storage trade-off
+## 2. Cloud topology — region / managed-vs-self / tenancy /
+network / ROM cost
+## 3. API contract — 3–5 endpoints (method + path + status +
+idempotency)
+## 4. Sequence — happy + 1 sad + 1 weird with named invariant
+## 5. Performance baseline + monitoring — 3 baselines + 3 alerts
++ 1 leading indicator</a:t>
             </a:r>
           </a:p>
         </p:txBody>

--- a/week-08/presentations/ppts/day-03-capstone-architecture-ai-spec.pptx
+++ b/week-08/presentations/ppts/day-03-capstone-architecture-ai-spec.pptx
@@ -788,7 +788,7 @@
             </a:pPr>
             <a:r>
               <a:rPr/>
-              <a:t>If a triad blasts through 5 prompts in 10 min, they skipped validation. Walk over.</a:t>
+              <a:t>If a quad blasts through 5 prompts in 10 min, they skipped validation. Walk over.</a:t>
             </a:r>
           </a:p>
         </p:txBody>
@@ -952,7 +952,7 @@
             </a:pPr>
             <a:r>
               <a:rPr/>
-              <a:t>Frame the block: catch what the author triad missed. Set context briefly, then move into the teaching content.</a:t>
+              <a:t>Frame the block: catch what the author quad missed. Set context briefly, then move into the teaching content.</a:t>
             </a:r>
           </a:p>
         </p:txBody>
@@ -1362,7 +1362,7 @@
             </a:pPr>
             <a:r>
               <a:rPr/>
-              <a:t>By 16:00, every triad has 4 documents: PRD-light, TCD-light, TMD-light, AI Spec v1.</a:t>
+              <a:t>By 16:00, every quad has 4 documents: PRD-light, TCD-light, TMD-light, AI Spec v1.</a:t>
             </a:r>
           </a:p>
         </p:txBody>
@@ -5036,7 +5036,7 @@
             </a:pPr>
             <a:r>
               <a:rPr b="1"/>
-              <a:t>Triads • 40 minutes</a:t>
+              <a:t>Quads • 40 minutes</a:t>
             </a:r>
           </a:p>
           <a:p>
@@ -5582,7 +5582,7 @@
             </a:pPr>
             <a:r>
               <a:rPr b="1"/>
-              <a:t>Triads • 40 minutes</a:t>
+              <a:t>Quads • 40 minutes</a:t>
             </a:r>
           </a:p>
           <a:p>
@@ -5656,7 +5656,7 @@
             </a:pPr>
             <a:r>
               <a:rPr/>
-              <a:t>Block 4 — Cross-Triad Spot-Check + Day-4 Setup</a:t>
+              <a:t>Block 4 — Cross-Quad Spot-Check + Day-4 Setup</a:t>
             </a:r>
           </a:p>
         </p:txBody>
@@ -5684,7 +5684,7 @@
             </a:pPr>
             <a:r>
               <a:rPr b="1"/>
-              <a:t>Catch what the author triad missed</a:t>
+              <a:t>Catch what the author quad missed</a:t>
             </a:r>
           </a:p>
         </p:txBody>
@@ -5731,7 +5731,7 @@
             </a:pPr>
             <a:r>
               <a:rPr/>
-              <a:t>🔎 Cross-Triad Validation Protocol</a:t>
+              <a:t>🔎 Cross-Quad Validation Protocol</a:t>
             </a:r>
           </a:p>
         </p:txBody>
@@ -5756,16 +5756,16 @@
             </a:pPr>
             <a:r>
               <a:rPr/>
-              <a:t>Pair triads</a:t>
-            </a:r>
-          </a:p>
-          <a:p>
-            <a:pPr lvl="0" indent="0" marL="0">
-              <a:buNone/>
-            </a:pPr>
-            <a:r>
-              <a:rPr/>
-              <a:t>Reviewer triad receives source artifacts + AI Spec v1</a:t>
+              <a:t>Pair quads</a:t>
+            </a:r>
+          </a:p>
+          <a:p>
+            <a:pPr lvl="0" indent="0" marL="0">
+              <a:buNone/>
+            </a:pPr>
+            <a:r>
+              <a:rPr/>
+              <a:t>Reviewer quad receives source artifacts + AI Spec v1</a:t>
             </a:r>
           </a:p>
           <a:p>
@@ -5792,7 +5792,7 @@
             </a:pPr>
             <a:r>
               <a:rPr/>
-              <a:t>Author triad listens; revises</a:t>
+              <a:t>Author quad listens; revises</a:t>
             </a:r>
           </a:p>
           <a:p>
@@ -5848,7 +5848,7 @@
             </a:pPr>
             <a:r>
               <a:rPr/>
-              <a:t>👥 Activity 4 — Cross-Triad + Day-4 Plan</a:t>
+              <a:t>👥 Activity 4 — Cross-Quad + Day-4 Plan</a:t>
             </a:r>
           </a:p>
         </p:txBody>
@@ -5876,7 +5876,7 @@
             </a:pPr>
             <a:r>
               <a:rPr b="1"/>
-              <a:t>Triad pairs • 45 minutes • Wrap</a:t>
+              <a:t>Quad pairs • 45 minutes • Wrap</a:t>
             </a:r>
           </a:p>
           <a:p>
@@ -6029,7 +6029,7 @@
             </a:pPr>
             <a:r>
               <a:rPr/>
-              <a:t>Cross-triad validation findings</a:t>
+              <a:t>Cross-quad validation findings</a:t>
             </a:r>
           </a:p>
           <a:p>
@@ -6083,7 +6083,7 @@
             </a:pPr>
             <a:r>
               <a:rPr/>
-              <a:t>Bring to Day 4: All 4 documents + cross-triad findings. Tomorrow we make them ship-ready.</a:t>
+              <a:t>Bring to Day 4: All 4 documents + cross-quad findings. Tomorrow we make them ship-ready.</a:t>
             </a:r>
           </a:p>
         </p:txBody>
@@ -6332,7 +6332,7 @@
             </a:pPr>
             <a:r>
               <a:rPr/>
-              <a:t>Cross-triad spot-check the AI Spec against sources</a:t>
+              <a:t>Cross-quad spot-check the AI Spec against sources</a:t>
             </a:r>
           </a:p>
           <a:p>
@@ -6566,7 +6566,7 @@
             </a:pPr>
             <a:r>
               <a:rPr/>
-              <a:t>Cross-triad spot-check + Day-4 setup</a:t>
+              <a:t>Cross-quad spot-check + Day-4 setup</a:t>
             </a:r>
           </a:p>
         </p:txBody>
@@ -6798,7 +6798,7 @@
             </a:pPr>
             <a:r>
               <a:rPr b="1"/>
-              <a:t>Triads • 40 minutes</a:t>
+              <a:t>Quads • 40 minutes</a:t>
             </a:r>
           </a:p>
           <a:p>

--- a/week-08/presentations/ppts/day-03-capstone-architecture-ai-spec.pptx
+++ b/week-08/presentations/ppts/day-03-capstone-architecture-ai-spec.pptx
@@ -5036,7 +5036,7 @@
             </a:pPr>
             <a:r>
               <a:rPr b="1"/>
-              <a:t>Quads • 40 minutes</a:t>
+              <a:t>Quads • 50 minutes</a:t>
             </a:r>
           </a:p>
           <a:p>
@@ -5582,7 +5582,7 @@
             </a:pPr>
             <a:r>
               <a:rPr b="1"/>
-              <a:t>Quads • 40 minutes</a:t>
+              <a:t>Quads • 50 minutes</a:t>
             </a:r>
           </a:p>
           <a:p>
@@ -5876,7 +5876,7 @@
             </a:pPr>
             <a:r>
               <a:rPr b="1"/>
-              <a:t>Quad pairs • 45 minutes • Wrap</a:t>
+              <a:t>Quad pairs • 55 minutes • Wrap</a:t>
             </a:r>
           </a:p>
           <a:p>
@@ -6641,7 +6641,7 @@
             </a:pPr>
             <a:r>
               <a:rPr b="1"/>
-              <a:t>Week 4 in 40 minutes</a:t>
+              <a:t>Week 4 in 45 minutes</a:t>
             </a:r>
           </a:p>
         </p:txBody>
@@ -6798,7 +6798,7 @@
             </a:pPr>
             <a:r>
               <a:rPr b="1"/>
-              <a:t>Quads • 40 minutes</a:t>
+              <a:t>Quads • 45 minutes</a:t>
             </a:r>
           </a:p>
           <a:p>
@@ -6927,7 +6927,7 @@
             </a:pPr>
             <a:r>
               <a:rPr b="1"/>
-              <a:t>Week 5 in 40 minutes</a:t>
+              <a:t>Week 5 in 50 minutes</a:t>
             </a:r>
           </a:p>
         </p:txBody>

--- a/week-08/presentations/ppts/day-03-capstone-architecture-ai-spec.pptx
+++ b/week-08/presentations/ppts/day-03-capstone-architecture-ai-spec.pptx
@@ -5045,7 +5045,7 @@
             </a:pPr>
             <a:r>
               <a:rPr/>
-              <a:t>10 min: data model + 1 trade-off</a:t>
+              <a:t>20 min: data model + 1 trade-off</a:t>
             </a:r>
           </a:p>
           <a:p>
@@ -5090,7 +5090,7 @@
             </a:pPr>
             <a:r>
               <a:rPr/>
-              <a:t>⏱ 10 + 10 + 10 + 5 + 5</a:t>
+              <a:t>⏱ 20 + 10 + 10 + 5 + 5</a:t>
             </a:r>
           </a:p>
         </p:txBody>
@@ -5591,7 +5591,7 @@
             </a:pPr>
             <a:r>
               <a:rPr/>
-              <a:t>8 min × 5 prompts = 40 min total</a:t>
+              <a:t>10 min × 5 prompts = 50 min total</a:t>
             </a:r>
           </a:p>
           <a:p>
@@ -5609,7 +5609,7 @@
             </a:pPr>
             <a:r>
               <a:rPr/>
-              <a:t>⏱ 8 × 5 prompts</a:t>
+              <a:t>⏱ 10 × 5 prompts</a:t>
             </a:r>
           </a:p>
         </p:txBody>
@@ -5894,7 +5894,7 @@
             </a:pPr>
             <a:r>
               <a:rPr/>
-              <a:t>20 min: validation pass on 5–10 specific claims</a:t>
+              <a:t>30 min: validation pass on 5–10 specific claims</a:t>
             </a:r>
           </a:p>
           <a:p>
@@ -5921,7 +5921,7 @@
             </a:pPr>
             <a:r>
               <a:rPr/>
-              <a:t>⏱ 5 + 20 + 5 + 15 · 15-min wrap</a:t>
+              <a:t>⏱ 5 + 30 + 5 + 15 · 15-min wrap</a:t>
             </a:r>
           </a:p>
         </p:txBody>
@@ -6807,7 +6807,7 @@
             </a:pPr>
             <a:r>
               <a:rPr/>
-              <a:t>10 min: architecture stance (3-question frame)</a:t>
+              <a:t>15 min: architecture stance (3-question frame)</a:t>
             </a:r>
           </a:p>
           <a:p>
@@ -6852,7 +6852,7 @@
             </a:pPr>
             <a:r>
               <a:rPr/>
-              <a:t>⏱ 10 + 10 + 10 + 5 + 5</a:t>
+              <a:t>⏱ 15 + 10 + 10 + 5 + 5</a:t>
             </a:r>
           </a:p>
         </p:txBody>
